--- a/public/fun/pack/pptx/familypro/가족소개프리미엄_27_아이와함께_코퍼차콜.pptx
+++ b/public/fun/pack/pptx/familypro/가족소개프리미엄_27_아이와함께_코퍼차콜.pptx
@@ -113,12 +113,12 @@
   <p:extLst>
     <p:ext uri="{521415D9-36F7-43E2-AB2F-B90AF26B5E84}">
       <p14:sectionLst xmlns:p14="http://schemas.microsoft.com/office/powerpoint/2010/main">
-        <p14:section name="시작" id="{A3816C44-AAA6-4693-B521-E8954FE80921}">
+        <p14:section name="시작" id="{193476FB-69C5-4321-9971-BFF1FBC06A24}">
           <p14:sldIdLst>
             <p14:sldId id="256"/>
           </p14:sldIdLst>
         </p14:section>
-        <p14:section name="본문" id="{68E46CB5-DF78-4B2A-AE1A-D656B7832E2E}">
+        <p14:section name="본문" id="{8F443119-6B6B-44E9-8ADC-2F2A95FB6344}">
           <p14:sldIdLst>
             <p14:sldId id="257"/>
             <p14:sldId id="258"/>
@@ -127,7 +127,7 @@
             <p14:sldId id="261"/>
           </p14:sldIdLst>
         </p14:section>
-        <p14:section name="마무리" id="{3DB6591B-A47F-4107-BAB5-26BF3B5ED793}">
+        <p14:section name="마무리" id="{60EDCDB3-BEBB-4855-A4B9-EF4502B39E3D}">
           <p14:sldIdLst>
             <p14:sldId id="262"/>
           </p14:sldIdLst>
@@ -1517,7 +1517,7 @@
             </a:lvl1pPr>
           </a:lstStyle>
           <a:p>
-            <a:fld id="{9D67E4C6-C228-41FB-8F66-68EB836AC57D}" type="slidenum">
+            <a:fld id="{711FFE81-46ED-47E0-9982-D7A50F2E8400}" type="slidenum">
               <a:rPr lang="en-US"/>
               <a:t>‹#›</a:t>
             </a:fld>
@@ -2105,7 +2105,7 @@
             </a:lvl1pPr>
           </a:lstStyle>
           <a:p>
-            <a:fld id="{752D676A-8861-455A-8ED6-92C32D6E78BA}" type="slidenum">
+            <a:fld id="{62903F3E-7A88-49F4-9DF1-344C957A8DA7}" type="slidenum">
               <a:rPr lang="en-US"/>
               <a:t>‹#›</a:t>
             </a:fld>
@@ -2694,7 +2694,7 @@
             </a:lvl1pPr>
           </a:lstStyle>
           <a:p>
-            <a:fld id="{69CB5C7E-0CE7-49DC-8F25-9FF8E6957D53}" type="slidenum">
+            <a:fld id="{29E1CF56-0E68-4312-BE8D-5C391AAFA1AF}" type="slidenum">
               <a:rPr lang="en-US"/>
               <a:t>‹#›</a:t>
             </a:fld>
@@ -3497,7 +3497,7 @@
           <a:p>
             <a:r>
               <a:rPr lang="ko-KR"/>
-              <a:t>아이와 함께 · 0000. 00. 00</a:t>
+              <a:t>아이와 함께 · 날짜 입력</a:t>
             </a:r>
           </a:p>
         </p:txBody>
@@ -3854,7 +3854,7 @@
           <a:bodyPr/>
           <a:lstStyle/>
           <a:p>
-            <a:fld id="{602D4A60-76E1-464B-9805-87F6549D941D}" type="slidenum">
+            <a:fld id="{2EA39C0D-9724-4AC2-BC2A-DC51FBE9B693}" type="slidenum">
               <a:rPr lang="en-US"/>
               <a:t>‹#›</a:t>
             </a:fld>
@@ -4658,7 +4658,7 @@
           <a:bodyPr/>
           <a:lstStyle/>
           <a:p>
-            <a:fld id="{5ADB83A5-861D-4B64-B21A-4D9422553FCA}" type="slidenum">
+            <a:fld id="{6DBD1753-CA5F-47A7-949D-69E0E6429E80}" type="slidenum">
               <a:rPr lang="en-US"/>
               <a:t>‹#›</a:t>
             </a:fld>
@@ -5500,7 +5500,7 @@
           <a:bodyPr/>
           <a:lstStyle/>
           <a:p>
-            <a:fld id="{2C0C8A60-D035-48D2-B2EB-C6782293255D}" type="slidenum">
+            <a:fld id="{BCDA15EF-0A87-4BDE-99CB-6C0CDCB402D9}" type="slidenum">
               <a:rPr lang="en-US"/>
               <a:t>‹#›</a:t>
             </a:fld>
@@ -6845,7 +6845,7 @@
           <a:bodyPr/>
           <a:lstStyle/>
           <a:p>
-            <a:fld id="{ED9D288B-E982-4D0D-8FBE-57658CC9D262}" type="slidenum">
+            <a:fld id="{D3A30BA9-6EF9-435C-85CE-2506FF5448C1}" type="slidenum">
               <a:rPr lang="en-US"/>
               <a:t>‹#›</a:t>
             </a:fld>
@@ -6933,7 +6933,7 @@
           <a:bodyPr/>
           <a:lstStyle/>
           <a:p>
-            <a:fld id="{01CBBE30-3039-4FF2-B412-14F1FFAC8C18}" type="slidenum">
+            <a:fld id="{20AF7C39-5CEF-4A97-8EF1-62C071FA72B3}" type="slidenum">
               <a:rPr lang="en-US"/>
               <a:t>‹#›</a:t>
             </a:fld>
